--- a/ВКР Гоцуляк.pptx
+++ b/ВКР Гоцуляк.pptx
@@ -2478,7 +2478,7 @@
 </file>
 
 <file path=ppt/slides/slide10.xml><?xml version="1.0" encoding="utf-8"?>
-<p:sld xmlns:a="http://schemas.openxmlformats.org/drawingml/2006/main" xmlns:r="http://schemas.openxmlformats.org/officeDocument/2006/relationships" xmlns:p="http://schemas.openxmlformats.org/presentationml/2006/main">
+<p:sld xmlns:a="http://schemas.openxmlformats.org/drawingml/2006/main" xmlns:p="http://schemas.openxmlformats.org/presentationml/2006/main" xmlns:r="http://schemas.openxmlformats.org/officeDocument/2006/relationships">
   <p:cSld name="Slide 10">
     <p:bg>
       <p:bgPr>
@@ -3210,6 +3210,50 @@
               <a:t>00:00:10</a:t>
             </a:r>
             <a:endParaRPr lang="en-US" sz="1200" dirty="0"/>
+          </a:p>
+        </p:txBody>
+      </p:sp>
+      <p:sp>
+        <p:nvSpPr>
+          <p:cNvPr id="21" name="GitHub repository"/>
+          <p:cNvSpPr/>
+          <p:nvPr/>
+        </p:nvSpPr>
+        <p:spPr>
+          <a:xfrm>
+            <a:off x="812800" y="5200000"/>
+            <a:ext cx="10566400" cy="400000"/>
+          </a:xfrm>
+          <a:prstGeom prst="rect">
+            <a:avLst/>
+          </a:prstGeom>
+          <a:noFill/>
+          <a:ln/>
+        </p:spPr>
+        <p:txBody>
+          <a:bodyPr wrap="square" lIns="0" tIns="0" rIns="0" bIns="0" rtlCol="0" anchor="t">
+            <a:normAutofit/>
+          </a:bodyPr>
+          <a:lstStyle/>
+          <a:p>
+            <a:pPr algn="l" indent="0" marL="0">
+              <a:lnSpc>
+                <a:spcPts val="1680"/>
+              </a:lnSpc>
+              <a:buNone/>
+            </a:pPr>
+            <a:r>
+              <a:rPr lang="en-US" sz="1600" dirty="0" u="sng">
+                <a:solidFill>
+                  <a:srgbClr val="6E6E80"/>
+                </a:solidFill>
+                <a:latin typeface="Manrope" pitchFamily="34" charset="0"/>
+                <a:ea typeface="Manrope" pitchFamily="34" charset="-122"/>
+                <a:cs typeface="Manrope" pitchFamily="34" charset="-120"/>
+                <a:hlinkClick r:id="rId3"/>
+              </a:rPr>
+              <a:t>github.com/TimcherS/vkr-video-generation</a:t>
+            </a:r>
           </a:p>
         </p:txBody>
       </p:sp>

--- a/ВКР Гоцуляк.pptx
+++ b/ВКР Гоцуляк.pptx
@@ -3221,8 +3221,8 @@
         </p:nvSpPr>
         <p:spPr>
           <a:xfrm>
-            <a:off x="812800" y="5200000"/>
-            <a:ext cx="10566400" cy="400000"/>
+            <a:off x="2159000" y="5257800"/>
+            <a:ext cx="8890000" cy="400000"/>
           </a:xfrm>
           <a:prstGeom prst="rect">
             <a:avLst/>
@@ -3257,6 +3257,32 @@
           </a:p>
         </p:txBody>
       </p:sp>
+      <p:pic>
+        <p:nvPicPr>
+          <p:cNvPr id="22" name="GitHub QR code" descr="https://github.com/TimcherS/vkr-video-generation">
+            <a:hlinkClick r:id="rId3"/>
+          </p:cNvPr>
+          <p:cNvPicPr>
+            <a:picLocks noChangeAspect="1"/>
+          </p:cNvPicPr>
+          <p:nvPr/>
+        </p:nvPicPr>
+        <p:blipFill>
+          <a:blip r:embed="rId4"/>
+          <a:stretch>
+            <a:fillRect/>
+          </a:stretch>
+        </p:blipFill>
+        <p:spPr>
+          <a:xfrm>
+            <a:off x="812800" y="4826000"/>
+            <a:ext cx="1193800" cy="1193800"/>
+          </a:xfrm>
+          <a:prstGeom prst="rect">
+            <a:avLst/>
+          </a:prstGeom>
+        </p:spPr>
+      </p:pic>
     </p:spTree>
   </p:cSld>
   <p:clrMapOvr>
